--- a/docs/pitch/gajufreight-pitch-deck.pptx
+++ b/docs/pitch/gajufreight-pitch-deck.pptx
@@ -1141,7 +1141,7 @@
           <a:lstStyle/>
           <a:p>
             <a:r>
-              <a:t>Network fees are about 0.0002 Gaju per action, so a whole shipment with two legs costs about 0.0044 Gaju in network fees, shared between the parties. Prices and payments are in Gaju (木) for now; other currencies are out of scope for the pilot.</a:t>
+              <a:t>Network fees are about 0.0002 Gaju per action, so a whole shipment with two legs costs about 0.0044 Gaju in network fees, shared between the parties. Prices and payments are in Gaju (木) for now; other currencies are out of scope for the pilot. The fee rate and minimum are set by GajuFreight's admin vote and can change, but a shipment keeps the rate in force when its quotes were requested; the 10% cap is built into the contract.</a:t>
             </a:r>
           </a:p>
         </p:txBody>
@@ -10008,7 +10008,7 @@
                 </a:solidFill>
                 <a:latin typeface="Montserrat"/>
               </a:rPr>
-              <a:t>Pay the agreed price, and nothing more. Refunds carry no fee.</a:t>
+              <a:t>Pay the agreed price, and nothing more. Refunds and your share of a dispute split carry no fee.</a:t>
             </a:r>
           </a:p>
         </p:txBody>

--- a/docs/pitch/gajufreight-pitch-deck.pptx
+++ b/docs/pitch/gajufreight-pitch-deck.pptx
@@ -931,7 +931,7 @@
           <a:lstStyle/>
           <a:p>
             <a:r>
-              <a:t>Fee: 1% of payouts, with a minimum of 1 Gaju and never more than 10% of any payout. The rate is fixed when the quote is requested, so it can't change mid-shipment.</a:t>
+              <a:t>Fee: 1% of the shipping cost, taken from payouts, with a minimum of 1 Gaju. The contract never takes more than 10% of the shipping cost, even for a tiny shipment. The rate is fixed when the quote is requested, so it can't change mid-shipment.</a:t>
             </a:r>
           </a:p>
         </p:txBody>
@@ -1141,7 +1141,7 @@
           <a:lstStyle/>
           <a:p>
             <a:r>
-              <a:t>Network fees are about 0.0002 Gaju per action, so a whole shipment with two legs costs about 0.0044 Gaju in network fees, shared between the parties. Prices and payments are in Gaju (木) for now; other currencies are out of scope for the pilot. The fee rate and minimum are set by GajuFreight's admin vote and can change, but a shipment keeps the rate in force when its quotes were requested; the 10% cap is built into the contract.</a:t>
+              <a:t>Network fees are about 0.0002 Gaju per action, so a whole shipment with two legs costs about 0.0044 Gaju in network fees, shared between the parties. Prices and payments are in Gaju (木) for now; other currencies are out of scope for the pilot. The fee starts at 1% with a 1 Gaju minimum; both are set by GajuFreight's admin vote and can change, but a shipment keeps the settings in force when its quotes were requested. The 10% limit is fixed in the contract: no vote can raise the rate above it, and it overrides the minimum.</a:t>
             </a:r>
           </a:p>
         </p:txBody>
@@ -10130,7 +10130,7 @@
                 </a:solidFill>
                 <a:latin typeface="Montserrat"/>
               </a:rPr>
-              <a:t>1% of each payout (minimum 1 Gaju, never more than 10% of a payout), fixed when the quote is requested.</a:t>
+              <a:t>1% of the shipping cost (minimum 1 Gaju), fixed when the quote is requested. Never more than 10%: a limit built into the contract.</a:t>
             </a:r>
           </a:p>
         </p:txBody>

--- a/docs/pitch/gajufreight-pitch-deck.pptx
+++ b/docs/pitch/gajufreight-pitch-deck.pptx
@@ -861,7 +861,7 @@
           <a:lstStyle/>
           <a:p>
             <a:r>
-              <a:t>The shipper pays exactly the agreed price: the platform fee comes out of the forwarder's payouts, and refunds carry no fee.</a:t>
+              <a:t>The shipper pays exactly the agreed price: the forwarder pays the platform fee when it confirms the booking, and refunds carry no fee.</a:t>
             </a:r>
           </a:p>
         </p:txBody>
@@ -931,7 +931,7 @@
           <a:lstStyle/>
           <a:p>
             <a:r>
-              <a:t>Fee: 1% of the shipping cost, taken from payouts, with a minimum of 1 Gaju. The contract never takes more than 10% of the shipping cost, even for a tiny shipment. The rate is fixed when the quote is requested, so it can't change mid-shipment.</a:t>
+              <a:t>Fee: 1% of the shipping cost, with a minimum of 1 Gaju, staked when you confirm the booking and kept if you then fail to deliver. Your payouts carry no fee. The contract never takes more than 10% of the shipping cost, even for a tiny shipment, and the rate is fixed when the quote is requested.</a:t>
             </a:r>
           </a:p>
         </p:txBody>
@@ -1001,7 +1001,7 @@
           <a:lstStyle/>
           <a:p>
             <a:r>
-              <a:t>Gajumaru is a public blockchain. The contracts are small, open source and will be externally audited before any real money flows.</a:t>
+              <a:t>Gajumaru is a public blockchain. The contracts are small, open source and will be externally audited before any real money flows. Forwarders and carriers are verified businesses: anyone can check the badge, and a company proves who it is to the customers it chooses, without its name going on the public ledger.</a:t>
             </a:r>
           </a:p>
         </p:txBody>
@@ -1141,7 +1141,7 @@
           <a:lstStyle/>
           <a:p>
             <a:r>
-              <a:t>Network fees are about 0.0002 Gaju per action, so a whole shipment with two legs costs about 0.0044 Gaju in network fees, shared between the parties. Prices and payments are in Gaju (木) for now; other currencies are out of scope for the pilot. The fee starts at 1% with a 1 Gaju minimum; both are set by GajuFreight's admin vote and can change, but a shipment keeps the settings in force when its quotes were requested. The 10% limit is fixed in the contract: no vote can raise the rate above it, and it overrides the minimum.</a:t>
+              <a:t>Network fees are about 0.0002 Gaju per action, so a whole shipment with two legs costs about 0.005 Gaju in network fees, shared between the parties. Prices and payments are in Gaju (木) for now; other currencies are out of scope for the pilot. The fee starts at 1% with a 1 Gaju minimum; both are set by GajuFreight's admin vote and can change, but a shipment keeps the settings in force when its quotes were requested. The 10% limit is fixed in the contract: no vote can raise the rate above it, and it overrides the minimum.</a:t>
             </a:r>
           </a:p>
         </p:txBody>
@@ -6592,7 +6592,7 @@
                 <a:gridCol w="3931920"/>
                 <a:gridCol w="4602175"/>
               </a:tblGrid>
-              <a:tr h="548640">
+              <a:tr h="480060">
                 <a:tc>
                   <a:txBody>
                     <a:bodyPr/>
@@ -6660,7 +6660,7 @@
                   </a:tcPr>
                 </a:tc>
               </a:tr>
-              <a:tr h="548640">
+              <a:tr h="480060">
                 <a:tc>
                   <a:txBody>
                     <a:bodyPr/>
@@ -6728,7 +6728,7 @@
                   </a:tcPr>
                 </a:tc>
               </a:tr>
-              <a:tr h="548640">
+              <a:tr h="480060">
                 <a:tc>
                   <a:txBody>
                     <a:bodyPr/>
@@ -6796,7 +6796,7 @@
                   </a:tcPr>
                 </a:tc>
               </a:tr>
-              <a:tr h="548640">
+              <a:tr h="480060">
                 <a:tc>
                   <a:txBody>
                     <a:bodyPr/>
@@ -6864,7 +6864,7 @@
                   </a:tcPr>
                 </a:tc>
               </a:tr>
-              <a:tr h="548640">
+              <a:tr h="480060">
                 <a:tc>
                   <a:txBody>
                     <a:bodyPr/>
@@ -6932,7 +6932,7 @@
                   </a:tcPr>
                 </a:tc>
               </a:tr>
-              <a:tr h="548640">
+              <a:tr h="480060">
                 <a:tc>
                   <a:txBody>
                     <a:bodyPr/>
@@ -7000,7 +7000,75 @@
                   </a:tcPr>
                 </a:tc>
               </a:tr>
-              <a:tr h="548640">
+              <a:tr h="480060">
+                <a:tc>
+                  <a:txBody>
+                    <a:bodyPr/>
+                    <a:lstStyle/>
+                    <a:p>
+                      <a:r>
+                        <a:rPr sz="1200" b="1">
+                          <a:solidFill>
+                            <a:srgbClr val="111827"/>
+                          </a:solidFill>
+                          <a:latin typeface="Montserrat"/>
+                        </a:rPr>
+                        <a:t>Who you're dealing with</a:t>
+                      </a:r>
+                    </a:p>
+                  </a:txBody>
+                  <a:tcPr anchor="ctr">
+                    <a:solidFill>
+                      <a:srgbClr val="FFFFFF"/>
+                    </a:solidFill>
+                  </a:tcPr>
+                </a:tc>
+                <a:tc>
+                  <a:txBody>
+                    <a:bodyPr/>
+                    <a:lstStyle/>
+                    <a:p>
+                      <a:r>
+                        <a:rPr sz="1200" b="0">
+                          <a:solidFill>
+                            <a:srgbClr val="4B5563"/>
+                          </a:solidFill>
+                          <a:latin typeface="Montserrat"/>
+                        </a:rPr>
+                        <a:t>A website and a letterhead</a:t>
+                      </a:r>
+                    </a:p>
+                  </a:txBody>
+                  <a:tcPr anchor="ctr">
+                    <a:solidFill>
+                      <a:srgbClr val="FFFFFF"/>
+                    </a:solidFill>
+                  </a:tcPr>
+                </a:tc>
+                <a:tc>
+                  <a:txBody>
+                    <a:bodyPr/>
+                    <a:lstStyle/>
+                    <a:p>
+                      <a:r>
+                        <a:rPr sz="1200" b="0">
+                          <a:solidFill>
+                            <a:srgbClr val="111827"/>
+                          </a:solidFill>
+                          <a:latin typeface="Montserrat"/>
+                        </a:rPr>
+                        <a:t>Verified businesses, with a badge anyone can check</a:t>
+                      </a:r>
+                    </a:p>
+                  </a:txBody>
+                  <a:tcPr anchor="ctr">
+                    <a:solidFill>
+                      <a:srgbClr val="FFF1EB"/>
+                    </a:solidFill>
+                  </a:tcPr>
+                </a:tc>
+              </a:tr>
+              <a:tr h="480060">
                 <a:tc>
                   <a:txBody>
                     <a:bodyPr/>
@@ -8083,7 +8151,7 @@
                 </a:solidFill>
                 <a:latin typeface="Montserrat"/>
               </a:rPr>
-              <a:t>The shipper funds the escrow when they book, so you never carry the credit risk.</a:t>
+              <a:t>The shipper funds the escrow when they book; you confirm before you move a box, so you never carry the credit risk.</a:t>
             </a:r>
           </a:p>
         </p:txBody>
@@ -9516,6 +9584,22 @@
               <a:t>Platform fees paid</a:t>
             </a:r>
           </a:p>
+          <a:p>
+            <a:pPr algn="l">
+              <a:spcAft>
+                <a:spcPts val="560"/>
+              </a:spcAft>
+            </a:pPr>
+            <a:r>
+              <a:rPr sz="1400" b="0">
+                <a:solidFill>
+                  <a:srgbClr val="111827"/>
+                </a:solidFill>
+                <a:latin typeface="Montserrat"/>
+              </a:rPr>
+              <a:t>Which addresses are verified businesses (no names)</a:t>
+            </a:r>
+          </a:p>
         </p:txBody>
       </p:sp>
       <p:sp>
@@ -10130,7 +10214,7 @@
                 </a:solidFill>
                 <a:latin typeface="Montserrat"/>
               </a:rPr>
-              <a:t>1% of the shipping cost (minimum 1 Gaju), fixed when the quote is requested. Never more than 10%: a limit built into the contract.</a:t>
+              <a:t>1% of the shipping cost (minimum 1 Gaju), staked when you confirm the booking and kept if you fail to deliver. Never more than 10%: a limit built into the contract.</a:t>
             </a:r>
           </a:p>
         </p:txBody>

--- a/docs/pitch/gajufreight-pitch-deck.pptx
+++ b/docs/pitch/gajufreight-pitch-deck.pptx
@@ -931,7 +931,7 @@
           <a:lstStyle/>
           <a:p>
             <a:r>
-              <a:t>Fee: 1% of the shipping cost, with a minimum of 1 Gaju, staked when you confirm the booking and kept if you then fail to deliver. Your payouts carry no fee. The contract never takes more than 10% of the shipping cost, even for a tiny shipment, and the rate is fixed when the quote is requested.</a:t>
+              <a:t>You pay GajuFreight's fee once, when you confirm the booking, and your payouts carry no fee: see Pricing.</a:t>
             </a:r>
           </a:p>
         </p:txBody>
@@ -1001,7 +1001,7 @@
           <a:lstStyle/>
           <a:p>
             <a:r>
-              <a:t>Gajumaru is a public blockchain. The contracts are small, open source and will be externally audited before any real money flows. Forwarders and carriers are verified businesses: anyone can check the badge, and a company proves who it is to the customers it chooses, without its name going on the public ledger.</a:t>
+              <a:t>Gajumaru is a public blockchain. The contracts are small, open source and will be externally audited before any real money flows. Verified businesses carry a badge anyone can check, and a company proves who it is to the customers it chooses, without its name going on the public ledger.</a:t>
             </a:r>
           </a:p>
         </p:txBody>
@@ -7057,7 +7057,7 @@
                           </a:solidFill>
                           <a:latin typeface="Montserrat"/>
                         </a:rPr>
-                        <a:t>Verified businesses, with a badge anyone can check</a:t>
+                        <a:t>A verification badge anyone can check</a:t>
                       </a:r>
                     </a:p>
                   </a:txBody>
@@ -7826,7 +7826,7 @@
                 </a:solidFill>
                 <a:latin typeface="Montserrat"/>
               </a:rPr>
-              <a:t>Invited forwarders quote on the same consignment; you pay the price you accepted and no platform fee.</a:t>
+              <a:t>Invited forwarders quote on the same consignment; you pay exactly the price you accepted.</a:t>
             </a:r>
           </a:p>
         </p:txBody>
@@ -8151,7 +8151,7 @@
                 </a:solidFill>
                 <a:latin typeface="Montserrat"/>
               </a:rPr>
-              <a:t>The shipper funds the escrow when they book; you confirm before you move a box, so you never carry the credit risk.</a:t>
+              <a:t>The shipper funds the escrow when they book, so you see the money before you confirm and never carry the credit risk.</a:t>
             </a:r>
           </a:p>
         </p:txBody>
@@ -10214,7 +10214,7 @@
                 </a:solidFill>
                 <a:latin typeface="Montserrat"/>
               </a:rPr>
-              <a:t>1% of the shipping cost (minimum 1 Gaju), staked when you confirm the booking and kept if you fail to deliver. Never more than 10%: a limit built into the contract.</a:t>
+              <a:t>1% of the shipping cost (minimum 1 Gaju), paid when you confirm the booking, however the shipment ends. Payouts carry no fee. Never more than 10%: a limit built into the contract.</a:t>
             </a:r>
           </a:p>
         </p:txBody>

--- a/docs/pitch/gajufreight-pitch-deck.pptx
+++ b/docs/pitch/gajufreight-pitch-deck.pptx
@@ -6078,7 +6078,7 @@
                 </a:solidFill>
                 <a:latin typeface="Montserrat"/>
               </a:rPr>
-              <a:t>2  Fund</a:t>
+              <a:t>2  Fund and confirm</a:t>
             </a:r>
           </a:p>
         </p:txBody>
@@ -6117,7 +6117,7 @@
                 </a:solidFill>
                 <a:latin typeface="Montserrat"/>
               </a:rPr>
-              <a:t>One signature locks the agreed price in an escrow contract, on exactly the agreed terms.</a:t>
+              <a:t>One signature locks the agreed price in escrow. The forwarder confirms, paying the fee; until then the shipper can cancel.</a:t>
             </a:r>
           </a:p>
         </p:txBody>

--- a/docs/pitch/gajufreight-pitch-deck.pptx
+++ b/docs/pitch/gajufreight-pitch-deck.pptx
@@ -5995,7 +5995,7 @@
                 </a:solidFill>
                 <a:latin typeface="Montserrat"/>
               </a:rPr>
-              <a:t>The shipper invites forwarders to quote. Up to three counter offers, then the shipper accepts. The terms are fixed.</a:t>
+              <a:t>The shipper invites forwarders to quote on a stated Incoterm. Up to three counter offers, then the shipper accepts. Terms are fixed.</a:t>
             </a:r>
           </a:p>
         </p:txBody>
@@ -6592,7 +6592,7 @@
                 <a:gridCol w="3931920"/>
                 <a:gridCol w="4602175"/>
               </a:tblGrid>
-              <a:tr h="480060">
+              <a:tr h="426720">
                 <a:tc>
                   <a:txBody>
                     <a:bodyPr/>
@@ -6660,7 +6660,7 @@
                   </a:tcPr>
                 </a:tc>
               </a:tr>
-              <a:tr h="480060">
+              <a:tr h="426720">
                 <a:tc>
                   <a:txBody>
                     <a:bodyPr/>
@@ -6728,7 +6728,7 @@
                   </a:tcPr>
                 </a:tc>
               </a:tr>
-              <a:tr h="480060">
+              <a:tr h="426720">
                 <a:tc>
                   <a:txBody>
                     <a:bodyPr/>
@@ -6796,7 +6796,7 @@
                   </a:tcPr>
                 </a:tc>
               </a:tr>
-              <a:tr h="480060">
+              <a:tr h="426720">
                 <a:tc>
                   <a:txBody>
                     <a:bodyPr/>
@@ -6864,7 +6864,7 @@
                   </a:tcPr>
                 </a:tc>
               </a:tr>
-              <a:tr h="480060">
+              <a:tr h="426720">
                 <a:tc>
                   <a:txBody>
                     <a:bodyPr/>
@@ -6932,7 +6932,7 @@
                   </a:tcPr>
                 </a:tc>
               </a:tr>
-              <a:tr h="480060">
+              <a:tr h="426720">
                 <a:tc>
                   <a:txBody>
                     <a:bodyPr/>
@@ -7000,7 +7000,75 @@
                   </a:tcPr>
                 </a:tc>
               </a:tr>
-              <a:tr h="480060">
+              <a:tr h="426720">
+                <a:tc>
+                  <a:txBody>
+                    <a:bodyPr/>
+                    <a:lstStyle/>
+                    <a:p>
+                      <a:r>
+                        <a:rPr sz="1200" b="1">
+                          <a:solidFill>
+                            <a:srgbClr val="111827"/>
+                          </a:solidFill>
+                          <a:latin typeface="Montserrat"/>
+                        </a:rPr>
+                        <a:t>Extra charges (storage, waiting, duties)</a:t>
+                      </a:r>
+                    </a:p>
+                  </a:txBody>
+                  <a:tcPr anchor="ctr">
+                    <a:solidFill>
+                      <a:srgbClr val="FFFFFF"/>
+                    </a:solidFill>
+                  </a:tcPr>
+                </a:tc>
+                <a:tc>
+                  <a:txBody>
+                    <a:bodyPr/>
+                    <a:lstStyle/>
+                    <a:p>
+                      <a:r>
+                        <a:rPr sz="1200" b="0">
+                          <a:solidFill>
+                            <a:srgbClr val="4B5563"/>
+                          </a:solidFill>
+                          <a:latin typeface="Montserrat"/>
+                        </a:rPr>
+                        <a:t>Separate invoices, chased for weeks</a:t>
+                      </a:r>
+                    </a:p>
+                  </a:txBody>
+                  <a:tcPr anchor="ctr">
+                    <a:solidFill>
+                      <a:srgbClr val="FFFFFF"/>
+                    </a:solidFill>
+                  </a:tcPr>
+                </a:tc>
+                <a:tc>
+                  <a:txBody>
+                    <a:bodyPr/>
+                    <a:lstStyle/>
+                    <a:p>
+                      <a:r>
+                        <a:rPr sz="1200" b="0">
+                          <a:solidFill>
+                            <a:srgbClr val="111827"/>
+                          </a:solidFill>
+                          <a:latin typeface="Montserrat"/>
+                        </a:rPr>
+                        <a:t>Proposed with evidence, paid straight through on acceptance</a:t>
+                      </a:r>
+                    </a:p>
+                  </a:txBody>
+                  <a:tcPr anchor="ctr">
+                    <a:solidFill>
+                      <a:srgbClr val="FFF1EB"/>
+                    </a:solidFill>
+                  </a:tcPr>
+                </a:tc>
+              </a:tr>
+              <a:tr h="426720">
                 <a:tc>
                   <a:txBody>
                     <a:bodyPr/>
@@ -7068,7 +7136,7 @@
                   </a:tcPr>
                 </a:tc>
               </a:tr>
-              <a:tr h="480060">
+              <a:tr h="426720">
                 <a:tc>
                   <a:txBody>
                     <a:bodyPr/>
@@ -10214,7 +10282,7 @@
                 </a:solidFill>
                 <a:latin typeface="Montserrat"/>
               </a:rPr>
-              <a:t>1% of the shipping cost (minimum 1 Gaju), paid when you confirm the booking, however the shipment ends. Payouts carry no fee. Never more than 10%: a limit built into the contract.</a:t>
+              <a:t>1% of the shipping cost (minimum 1 Gaju), paid when you confirm the booking, however the shipment ends. Payouts and extra charges carry no fee. Never more than 10%, by contract.</a:t>
             </a:r>
           </a:p>
         </p:txBody>

--- a/docs/pitch/gajufreight-pitch-deck.pptx
+++ b/docs/pitch/gajufreight-pitch-deck.pptx
@@ -8341,7 +8341,7 @@
                 </a:solidFill>
                 <a:latin typeface="Montserrat"/>
               </a:rPr>
-              <a:t>Each confirmed scan-in pays its milestone straight to you, improving cash flow on long moves.</a:t>
+              <a:t>Each attested scan-in, or a customs or on-board event, pays its milestone straight to you, improving cash flow.</a:t>
             </a:r>
           </a:p>
         </p:txBody>

--- a/docs/pitch/gajufreight-pitch-deck.pptx
+++ b/docs/pitch/gajufreight-pitch-deck.pptx
@@ -1001,7 +1001,7 @@
           <a:lstStyle/>
           <a:p>
             <a:r>
-              <a:t>Gajumaru is a public blockchain. The contracts are small, open source and will be externally audited before any real money flows. Verified businesses carry a badge anyone can check, and a company proves who it is to the customers it chooses, without its name going on the public ledger.</a:t>
+              <a:t>Gajumaru is a public blockchain. The contracts are small, open source and will be externally audited before any real money flows. Verified businesses carry a badge anyone can check, and a company proves who it is to the customers it chooses, without its name going on the public ledger. Disputes go to verified, independent arbiters paid the same whichever way they rule; the raiser stakes a small deposit, and the consignee never pays to report a problem.</a:t>
             </a:r>
           </a:p>
         </p:txBody>
@@ -6361,7 +6361,7 @@
                 </a:solidFill>
                 <a:latin typeface="Montserrat"/>
               </a:rPr>
-              <a:t>Proven delivery releases the rest. Missed deadline: the shipper is refunded. Dispute: a panel decides.</a:t>
+              <a:t>Proven delivery releases the rest. Missed deadline: the shipper is refunded. Dispute: verified arbiters decide.</a:t>
             </a:r>
           </a:p>
         </p:txBody>
@@ -6989,7 +6989,7 @@
                           </a:solidFill>
                           <a:latin typeface="Montserrat"/>
                         </a:rPr>
-                        <a:t>Panel of arbiters, with a fallback split agreed up front</a:t>
+                        <a:t>Verified arbiters, paid whichever way they rule; fallback agreed</a:t>
                       </a:r>
                     </a:p>
                   </a:txBody>

--- a/docs/pitch/gajufreight-pitch-deck.pptx
+++ b/docs/pitch/gajufreight-pitch-deck.pptx
@@ -1001,7 +1001,7 @@
           <a:lstStyle/>
           <a:p>
             <a:r>
-              <a:t>Gajumaru is a public blockchain. The contracts are small, open source and will be externally audited before any real money flows. Verified businesses carry a badge anyone can check, and a company proves who it is to the customers it chooses, without its name going on the public ledger. Disputes go to verified, independent arbiters paid the same whichever way they rule; the raiser stakes a small deposit, and the consignee never pays to report a problem.</a:t>
+              <a:t>Gajumaru is a public blockchain. The contracts are small, open source and will be externally audited before any real money flows. Verified businesses carry a badge anyone can check, and a company proves who it is to the customers it chooses, without its name going on the public ledger. Disputes go to verified arbiters that both sides shape, paid for voting whichever way they rule; the raiser stakes a small deposit, and the consignee never pays to report a problem.</a:t>
             </a:r>
           </a:p>
         </p:txBody>

--- a/docs/pitch/gajufreight-pitch-deck.pptx
+++ b/docs/pitch/gajufreight-pitch-deck.pptx
@@ -4979,7 +4979,7 @@
                 </a:solidFill>
                 <a:latin typeface="Montserrat"/>
               </a:rPr>
-              <a:t>Contact details to add</a:t>
+              <a:t>Shane P · shane@argodevops.co.uk</a:t>
             </a:r>
           </a:p>
         </p:txBody>
